--- a/Abstracts and Talks/ALFAL 2026/Deliverables/ALFAL 2026 Presentation.pptx
+++ b/Abstracts and Talks/ALFAL 2026/Deliverables/ALFAL 2026 Presentation.pptx
@@ -23899,75 +23899,7 @@
               <a:buNone/>
             </a:pPr>
             <a:r>
-              <a:rPr lang="en-US" sz="950" dirty="0">
-                <a:latin typeface="Palatino" pitchFamily="2" charset="77"/>
-                <a:ea typeface="Palatino" pitchFamily="2" charset="77"/>
-              </a:rPr>
-              <a:t>Hur, E. (2020). Verbal lexical frequency and DOM in heritage speakers of Spanish. In A. </a:t>
-            </a:r>
-            <a:r>
-              <a:rPr lang="en-US" sz="950" dirty="0" err="1">
-                <a:latin typeface="Palatino" pitchFamily="2" charset="77"/>
-                <a:ea typeface="Palatino" pitchFamily="2" charset="77"/>
-              </a:rPr>
-              <a:t>Mardale</a:t>
-            </a:r>
-            <a:r>
-              <a:rPr lang="en-US" sz="950" dirty="0">
-                <a:latin typeface="Palatino" pitchFamily="2" charset="77"/>
-                <a:ea typeface="Palatino" pitchFamily="2" charset="77"/>
-              </a:rPr>
-              <a:t> &amp; S. </a:t>
-            </a:r>
-            <a:r>
-              <a:rPr lang="en-US" sz="950" dirty="0" err="1">
-                <a:latin typeface="Palatino" pitchFamily="2" charset="77"/>
-                <a:ea typeface="Palatino" pitchFamily="2" charset="77"/>
-              </a:rPr>
-              <a:t>Montrul</a:t>
-            </a:r>
-            <a:r>
-              <a:rPr lang="en-US" sz="950" dirty="0">
-                <a:latin typeface="Palatino" pitchFamily="2" charset="77"/>
-                <a:ea typeface="Palatino" pitchFamily="2" charset="77"/>
-              </a:rPr>
-              <a:t> (Eds.), </a:t>
-            </a:r>
-            <a:r>
-              <a:rPr lang="en-US" sz="950" i="1" dirty="0">
-                <a:latin typeface="Palatino" pitchFamily="2" charset="77"/>
-                <a:ea typeface="Palatino" pitchFamily="2" charset="77"/>
-              </a:rPr>
-              <a:t>Trends in language acquisition research</a:t>
-            </a:r>
-            <a:r>
-              <a:rPr lang="en-US" sz="950" dirty="0">
-                <a:latin typeface="Palatino" pitchFamily="2" charset="77"/>
-                <a:ea typeface="Palatino" pitchFamily="2" charset="77"/>
-              </a:rPr>
-              <a:t> (Vol. 26, pp. 207–235). John Benjamins. https://</a:t>
-            </a:r>
-            <a:r>
-              <a:rPr lang="en-US" sz="950" dirty="0" err="1">
-                <a:latin typeface="Palatino" pitchFamily="2" charset="77"/>
-                <a:ea typeface="Palatino" pitchFamily="2" charset="77"/>
-              </a:rPr>
-              <a:t>doi.org</a:t>
-            </a:r>
-            <a:r>
-              <a:rPr lang="en-US" sz="950" dirty="0">
-                <a:latin typeface="Palatino" pitchFamily="2" charset="77"/>
-                <a:ea typeface="Palatino" pitchFamily="2" charset="77"/>
-              </a:rPr>
-              <a:t>/10.1075/tilar.26.hur08</a:t>
-            </a:r>
-          </a:p>
-          <a:p>
-            <a:pPr marL="346075" indent="-346075">
-              <a:buNone/>
-            </a:pPr>
-            <a:r>
-              <a:rPr lang="en-US" sz="950" dirty="0" err="1">
+              <a:rPr lang="en-US" sz="950">
                 <a:latin typeface="Palatino" pitchFamily="2" charset="77"/>
                 <a:ea typeface="Palatino" pitchFamily="2" charset="77"/>
               </a:rPr>
@@ -24943,55 +24875,6 @@
                                           <p:spTgt spid="5">
                                             <p:txEl>
                                               <p:pRg st="11" end="11"/>
-                                            </p:txEl>
-                                          </p:spTgt>
-                                        </p:tgtEl>
-                                        <p:attrNameLst>
-                                          <p:attrName>style.visibility</p:attrName>
-                                        </p:attrNameLst>
-                                      </p:cBhvr>
-                                      <p:to>
-                                        <p:strVal val="visible"/>
-                                      </p:to>
-                                    </p:set>
-                                  </p:childTnLst>
-                                </p:cTn>
-                              </p:par>
-                            </p:childTnLst>
-                          </p:cTn>
-                        </p:par>
-                      </p:childTnLst>
-                    </p:cTn>
-                  </p:par>
-                  <p:par>
-                    <p:cTn id="51" fill="hold">
-                      <p:stCondLst>
-                        <p:cond delay="indefinite"/>
-                      </p:stCondLst>
-                      <p:childTnLst>
-                        <p:par>
-                          <p:cTn id="52" fill="hold">
-                            <p:stCondLst>
-                              <p:cond delay="0"/>
-                            </p:stCondLst>
-                            <p:childTnLst>
-                              <p:par>
-                                <p:cTn id="53" presetID="1" presetClass="entr" presetSubtype="0" fill="hold" nodeType="clickEffect">
-                                  <p:stCondLst>
-                                    <p:cond delay="0"/>
-                                  </p:stCondLst>
-                                  <p:childTnLst>
-                                    <p:set>
-                                      <p:cBhvr>
-                                        <p:cTn id="54" dur="1" fill="hold">
-                                          <p:stCondLst>
-                                            <p:cond delay="0"/>
-                                          </p:stCondLst>
-                                        </p:cTn>
-                                        <p:tgtEl>
-                                          <p:spTgt spid="5">
-                                            <p:txEl>
-                                              <p:pRg st="12" end="12"/>
                                             </p:txEl>
                                           </p:spTgt>
                                         </p:tgtEl>
